--- a/Curriculo/Fase3_Basico2/decks/Basico2_S08_Jay.pptx
+++ b/Curriculo/Fase3_Basico2/decks/Basico2_S08_Jay.pptx
@@ -129,7 +129,7 @@
   <p:extLst>
     <p:ext uri="{521415D9-36F7-43E2-AB2F-B90AF26B5E84}">
       <p14:sectionLst xmlns:p14="http://schemas.microsoft.com/office/powerpoint/2010/main">
-        <p14:section name="Semana 8" id="{3962E88F-2A3C-3291-0B0F-F4E4C504A36B}">
+        <p14:section name="Semana 8" id="{0B453D89-3BBA-A90F-0E44-5B3AD1914516}">
           <p14:sldIdLst>
             <p14:sldId id="256"/>
             <p14:sldId id="257"/>
@@ -190,7 +190,7 @@
     </p:spTree>
     <p:extLst>
       <p:ext uri="{BB962C8B-B14F-4D97-AF65-F5344CB8AC3E}">
-        <p14:creationId xmlns:p14="http://schemas.microsoft.com/office/powerpoint/2010/main" val="1970407442"/>
+        <p14:creationId xmlns:p14="http://schemas.microsoft.com/office/powerpoint/2010/main" val="1638754229"/>
       </p:ext>
     </p:extLst>
   </p:cSld>
@@ -604,7 +604,7 @@
             <a:r>
               <a:rPr lang="en-US" dirty="0"/>
               <a:t>21:10–21:40. Di «시작!» y deja esta lámina toda la media hora. Entre 21:12 y 21:20 crea las salas y asígnalas a mano con las parejas de la S7 (sin abrirlas; cierre automático a los 15 min, cuenta regresiva de 60 s). Solo dudas técnicas por chat privado; a las de contenido: «Responde lo que entiendas». Avisa en voz y en el chat a las 21:25 y 21:35; a las 21:40, «끝!», y a las 21:41 deja de aceptar respuestas.
-Imagen sugerida: Temporizador de 30 minutos en navy #003478 (nunca rojo)
+Imagen: incluida (dibujo de la casa).
 Fuente: Nueva
 Lámina 11</a:t>
             </a:r>
@@ -872,7 +872,7 @@
             <a:r>
               <a:rPr lang="en-US" dirty="0"/>
               <a:t>21:57 (20 s + 20 s). Con leve inclinación: 여러분, 정말 수고했어요! y espera el 감사합니다! «¿Ven? Yo les digo 수고했어요; ustedes a mí, 감사합니다. Entre compañeros, 수고했어요 está perfecto.» Luego ofrece una hoja a la cámara con las dos manos: «Su certificado es digital, pero en Corea un diploma se entrega y se recibe así: 두 손으로.» Ellos estiran las dos manos y dicen 감사합니다! ([validar] D-2).
-Imagen sugerida: Dibujo de dos manos entregando un diploma (두 손으로)
+Imagen: incluida (dibujo de la casa).
 Fuente: Nueva
 Lámina 14</a:t>
             </a:r>
@@ -1229,7 +1229,6 @@
             <a:r>
               <a:rPr lang="en-US" dirty="0"/>
               <a:t>22:00. En coreano: 축하해요! 화이팅! A las 22:00 en punto, «Finalizar reunión para todos». Si el cierre se alarga un par de minutos, que sea solo para el coro, avisando.
-Imagen sugerida: Logo azul de Academia Seúl
 Fuente: Portada de la plantilla
 Lámina 18</a:t>
             </a:r>
@@ -1942,7 +1941,7 @@
             <a:r>
               <a:rPr lang="en-US" dirty="0"/>
               <a:t>21:02–21:03 (1 min, español). «-고 es “y” entre dos acciones o dos características. Se pega a la raíz, sin mirar la vocal. Uno: el tiempo va solo en el último verbo, como un tren en que el último vagón lleva el cartel del tiempo. Dos: los irregulares no cambian, porque -고 empieza con consonante: 듣고, no 들고.» Coro: 따라 하세요: 먹고… 씻고… 듣고 (modela [먹꼬], [씯꼬], [듣꼬]).
-Imagen sugerida: Dibujo de un tren: el último vagón lleva el cartel del tiempo (pasado, futuro)
+Imagen: incluida (dibujo de la casa).
 Fuente: Adaptada de Sesion_07_Rutina_Diaria_v2.pptx lám. 13 y Sesion_09_Pasado.pptx lám. 6 (ejemplos nuevos)
 Lámina 4</a:t>
             </a:r>
@@ -2032,7 +2031,7 @@
             <a:r>
               <a:rPr lang="en-US" dirty="0"/>
               <a:t>21:03–21:04 (1 min, español). «-지만 es “pero” dentro de la misma frase: raíz + 지만. La diferencia con -고: -지만 sí lleva su propio pasado, porque son dos ideas que chocan. Y si quieres el “pero” entre dos frases, 그렇지만.» Coro: 따라 하세요: 어렵지만… 그렇지만… 어려웠지만 재미있었어요 ([어렵찌만] · [그러치만] · [어려웓찌만 재미이써써요]). 어려워지만, en gris con una línea.
-Imagen sugerida: Ícono de tijera junto a la raíz: «la raíz no cambia»
+Imagen: incluida (dibujo de la casa).
 Fuente: Adaptada de Sesion_10_Futuro_Vacaciones.pptx lám. 5 (ejemplos nuevos)
 Lámina 5</a:t>
             </a:r>
@@ -3362,7 +3361,7 @@
               <a:buNone/>
             </a:pPr>
             <a:r>
-              <a:rPr lang="en-US" sz="4400" b="1" dirty="0">
+              <a:rPr lang="en-US" sz="2900" b="1" dirty="0">
                 <a:solidFill>
                   <a:srgbClr val="FFFFFF"/>
                 </a:solidFill>
@@ -4474,7 +4473,7 @@
         <p:spPr>
           <a:xfrm>
             <a:off x="548640" y="1325880"/>
-            <a:ext cx="6949440" cy="548640"/>
+            <a:ext cx="5669280" cy="548640"/>
           </a:xfrm>
           <a:prstGeom prst="rect">
             <a:avLst/>
@@ -4512,7 +4511,7 @@
         <p:spPr>
           <a:xfrm>
             <a:off x="548640" y="1965960"/>
-            <a:ext cx="6949440" cy="4206240"/>
+            <a:ext cx="5669280" cy="4206240"/>
           </a:xfrm>
           <a:prstGeom prst="rect">
             <a:avLst/>
@@ -4534,7 +4533,7 @@
               <a:buChar char="•"/>
             </a:pPr>
             <a:r>
-              <a:rPr lang="ko-KR" altLang="en-US" sz="2400" dirty="0">
+              <a:rPr lang="ko-KR" altLang="en-US" sz="2800" dirty="0">
                 <a:solidFill>
                   <a:srgbClr val="14142B"/>
                 </a:solidFill>
@@ -4545,14 +4544,14 @@
               <a:t>21:10 · 시작</a:t>
             </a:r>
             <a:r>
-              <a:rPr lang="en-US" sz="2400" dirty="0">
+              <a:rPr lang="en-US" sz="2800" dirty="0">
                 <a:solidFill>
                   <a:srgbClr val="14142B"/>
                 </a:solidFill>
               </a:rPr>
               <a:t>!</a:t>
             </a:r>
-            <a:endParaRPr lang="en-US" sz="2400" dirty="0"/>
+            <a:endParaRPr lang="en-US" sz="2800" dirty="0"/>
           </a:p>
           <a:p>
             <a:pPr marL="228600" indent="-228600" eaLnBrk="1">
@@ -4563,7 +4562,7 @@
               <a:buChar char="•"/>
             </a:pPr>
             <a:r>
-              <a:rPr lang="ko-KR" altLang="en-US" sz="2400" dirty="0">
+              <a:rPr lang="ko-KR" altLang="en-US" sz="2800" dirty="0">
                 <a:solidFill>
                   <a:srgbClr val="14142B"/>
                 </a:solidFill>
@@ -4574,14 +4573,14 @@
               <a:t>21:25 · 15분 남았어요 </a:t>
             </a:r>
             <a:r>
-              <a:rPr lang="en-US" sz="2400" dirty="0">
+              <a:rPr lang="en-US" sz="2800" dirty="0">
                 <a:solidFill>
                   <a:srgbClr val="14142B"/>
                 </a:solidFill>
               </a:rPr>
               <a:t>(quedan 15 minutos)</a:t>
             </a:r>
-            <a:endParaRPr lang="en-US" sz="2400" dirty="0"/>
+            <a:endParaRPr lang="en-US" sz="2800" dirty="0"/>
           </a:p>
           <a:p>
             <a:pPr marL="228600" indent="-228600" eaLnBrk="1">
@@ -4592,7 +4591,7 @@
               <a:buChar char="•"/>
             </a:pPr>
             <a:r>
-              <a:rPr lang="ko-KR" altLang="en-US" sz="2400" dirty="0">
+              <a:rPr lang="ko-KR" altLang="en-US" sz="2800" dirty="0">
                 <a:solidFill>
                   <a:srgbClr val="14142B"/>
                 </a:solidFill>
@@ -4603,14 +4602,14 @@
               <a:t>21:35 · 5분 남았어요 </a:t>
             </a:r>
             <a:r>
-              <a:rPr lang="en-US" sz="2400" dirty="0">
+              <a:rPr lang="en-US" sz="2800" dirty="0">
                 <a:solidFill>
                   <a:srgbClr val="14142B"/>
                 </a:solidFill>
               </a:rPr>
               <a:t>(quedan 5 minutos)</a:t>
             </a:r>
-            <a:endParaRPr lang="en-US" sz="2400" dirty="0"/>
+            <a:endParaRPr lang="en-US" sz="2800" dirty="0"/>
           </a:p>
           <a:p>
             <a:pPr marL="228600" indent="-228600" eaLnBrk="1">
@@ -4621,7 +4620,7 @@
               <a:buChar char="•"/>
             </a:pPr>
             <a:r>
-              <a:rPr lang="ko-KR" altLang="en-US" sz="2400" dirty="0">
+              <a:rPr lang="ko-KR" altLang="en-US" sz="2800" dirty="0">
                 <a:solidFill>
                   <a:srgbClr val="14142B"/>
                 </a:solidFill>
@@ -4632,14 +4631,14 @@
               <a:t>21:40 · 끝</a:t>
             </a:r>
             <a:r>
-              <a:rPr lang="en-US" sz="2400" dirty="0">
+              <a:rPr lang="en-US" sz="2800" dirty="0">
                 <a:solidFill>
                   <a:srgbClr val="14142B"/>
                 </a:solidFill>
               </a:rPr>
               <a:t>!</a:t>
             </a:r>
-            <a:endParaRPr lang="en-US" sz="2400" dirty="0"/>
+            <a:endParaRPr lang="en-US" sz="2800" dirty="0"/>
           </a:p>
         </p:txBody>
       </p:sp>
@@ -4651,12 +4650,12 @@
         </p:nvSpPr>
         <p:spPr>
           <a:xfrm>
-            <a:off x="8001000" y="1417320"/>
-            <a:ext cx="3611880" cy="4480560"/>
+            <a:off x="6446520" y="1371600"/>
+            <a:ext cx="5193792" cy="4800600"/>
           </a:xfrm>
           <a:prstGeom prst="roundRect">
             <a:avLst>
-              <a:gd name="adj" fmla="val 6329"/>
+              <a:gd name="adj" fmla="val 4762"/>
             </a:avLst>
           </a:prstGeom>
           <a:solidFill>
@@ -4670,58 +4669,30 @@
           </a:ln>
         </p:spPr>
       </p:sp>
-      <p:sp>
-        <p:nvSpPr>
-          <p:cNvPr id="6" name="imagen_pendiente"/>
-          <p:cNvSpPr txBox="1"/>
+      <p:pic>
+        <p:nvPicPr>
+          <p:cNvPr id="6" name="imagen" descr="C:\Users\Chingu\AppData\Local\Temp\claude\C--Users-Chingu-Desktop-ACADEMIASEULWEB\d4111e1b-5523-44ea-97b2-b1a1d9545b9e\scratchpad\decks\cache\img_2d75b390df6b84ea.png"/>
+          <p:cNvPicPr>
+            <a:picLocks noChangeAspect="1"/>
+          </p:cNvPicPr>
           <p:nvPr/>
-        </p:nvSpPr>
+        </p:nvPicPr>
+        <p:blipFill>
+          <a:blip r:embed="rId3"/>
+          <a:stretch>
+            <a:fillRect/>
+          </a:stretch>
+        </p:blipFill>
         <p:spPr>
           <a:xfrm>
-            <a:off x="8183880" y="1600200"/>
-            <a:ext cx="3246120" cy="4114800"/>
+            <a:off x="7040833" y="1463040"/>
+            <a:ext cx="4005165" cy="4617720"/>
           </a:xfrm>
           <a:prstGeom prst="rect">
             <a:avLst/>
           </a:prstGeom>
-          <a:noFill/>
-          <a:ln/>
         </p:spPr>
-        <p:txBody>
-          <a:bodyPr wrap="square" lIns="76200" tIns="76200" rIns="76200" bIns="76200" rtlCol="0" anchor="ctr">
-            <a:normAutofit/>
-          </a:bodyPr>
-          <a:lstStyle/>
-          <a:p>
-            <a:pPr marL="0" indent="0" algn="ctr" eaLnBrk="1">
-              <a:buNone/>
-            </a:pPr>
-            <a:r>
-              <a:rPr lang="en-US" sz="1600" b="1" dirty="0">
-                <a:solidFill>
-                  <a:srgbClr val="4236F6"/>
-                </a:solidFill>
-              </a:rPr>
-              <a:t>Imagen pendiente</a:t>
-            </a:r>
-            <a:endParaRPr lang="en-US" sz="1600" dirty="0"/>
-          </a:p>
-          <a:p>
-            <a:pPr marL="0" indent="0" algn="ctr" eaLnBrk="1">
-              <a:buNone/>
-            </a:pPr>
-            <a:r>
-              <a:rPr lang="en-US" sz="1300" dirty="0">
-                <a:solidFill>
-                  <a:srgbClr val="5C5F6B"/>
-                </a:solidFill>
-              </a:rPr>
-              <a:t>Temporizador de 30 minutos en navy #003478 (nunca rojo)</a:t>
-            </a:r>
-            <a:endParaRPr lang="en-US" sz="1600" dirty="0"/>
-          </a:p>
-        </p:txBody>
-      </p:sp>
+      </p:pic>
       <p:sp>
         <p:nvSpPr>
           <p:cNvPr id="25" name="Slide Number Placeholder 0"/>
@@ -4863,7 +4834,7 @@
         <p:spPr>
           <a:xfrm>
             <a:off x="548640" y="1325880"/>
-            <a:ext cx="11064240" cy="457200"/>
+            <a:ext cx="11091672" cy="457200"/>
           </a:xfrm>
           <a:prstGeom prst="rect">
             <a:avLst/>
@@ -4901,7 +4872,7 @@
           <p:nvPr>
             <p:extLst>
               <p:ext uri="{D42A27DB-BD31-4B8C-83A1-F6EECF244321}">
-                <p14:modId xmlns:p14="http://schemas.microsoft.com/office/powerpoint/2010/main" val="1781548373"/>
+                <p14:modId xmlns:p14="http://schemas.microsoft.com/office/powerpoint/2010/main" val="3359274737"/>
               </p:ext>
             </p:extLst>
           </p:nvPr>
@@ -5615,7 +5586,7 @@
                           <a:ea typeface="Malgun Gothic" pitchFamily="34" charset="-122"/>
                           <a:cs typeface="Malgun Gothic" pitchFamily="34" charset="-120"/>
                         </a:rPr>
-                        <a:t>뭐 할 수 있어요</a:t>
+                        <a:t>뭐 할 수 있어요</a:t>
                       </a:r>
                       <a:r>
                         <a:rPr lang="en-US" sz="1800" dirty="0">
@@ -5634,7 +5605,7 @@
                           <a:ea typeface="Malgun Gothic" pitchFamily="34" charset="-122"/>
                           <a:cs typeface="Malgun Gothic" pitchFamily="34" charset="-120"/>
                         </a:rPr>
-                        <a:t>수영할 수 있어요</a:t>
+                        <a:t>수영할 수 있어요</a:t>
                       </a:r>
                       <a:r>
                         <a:rPr lang="en-US" sz="1800" dirty="0">
@@ -6627,16 +6598,40 @@
           </a:p>
         </p:txBody>
       </p:sp>
-      <p:sp>
-        <p:nvSpPr>
-          <p:cNvPr id="3" name="Text 1"/>
+      <p:pic>
+        <p:nvPicPr>
+          <p:cNvPr id="3" name="imagen" descr="C:\Users\Chingu\AppData\Local\Temp\claude\C--Users-Chingu-Desktop-ACADEMIASEULWEB\d4111e1b-5523-44ea-97b2-b1a1d9545b9e\scratchpad\decks\cache\img_1470c82dfc8a06af.png"/>
+          <p:cNvPicPr>
+            <a:picLocks noChangeAspect="1"/>
+          </p:cNvPicPr>
+          <p:nvPr/>
+        </p:nvPicPr>
+        <p:blipFill>
+          <a:blip r:embed="rId3"/>
+          <a:stretch>
+            <a:fillRect/>
+          </a:stretch>
+        </p:blipFill>
+        <p:spPr>
+          <a:xfrm>
+            <a:off x="8897112" y="2167666"/>
+            <a:ext cx="2743200" cy="3162748"/>
+          </a:xfrm>
+          <a:prstGeom prst="rect">
+            <a:avLst/>
+          </a:prstGeom>
+        </p:spPr>
+      </p:pic>
+      <p:sp>
+        <p:nvSpPr>
+          <p:cNvPr id="4" name="Text 1"/>
           <p:cNvSpPr txBox="1"/>
           <p:nvPr/>
         </p:nvSpPr>
         <p:spPr>
           <a:xfrm>
             <a:off x="548640" y="1325880"/>
-            <a:ext cx="11064240" cy="457200"/>
+            <a:ext cx="8074152" cy="457200"/>
           </a:xfrm>
           <a:prstGeom prst="rect">
             <a:avLst/>
@@ -6678,18 +6673,18 @@
       </p:sp>
       <p:sp>
         <p:nvSpPr>
-          <p:cNvPr id="4" name="col_0"/>
+          <p:cNvPr id="5" name="col_0"/>
           <p:cNvSpPr/>
           <p:nvPr/>
         </p:nvSpPr>
         <p:spPr>
           <a:xfrm>
             <a:off x="548640" y="1874520"/>
-            <a:ext cx="3483864" cy="4297680"/>
+            <a:ext cx="2478024" cy="4297680"/>
           </a:xfrm>
           <a:prstGeom prst="roundRect">
             <a:avLst>
-              <a:gd name="adj" fmla="val 3937"/>
+              <a:gd name="adj" fmla="val 5535"/>
             </a:avLst>
           </a:prstGeom>
           <a:solidFill>
@@ -6705,14 +6700,14 @@
       </p:sp>
       <p:sp>
         <p:nvSpPr>
-          <p:cNvPr id="5" name="Text 3"/>
+          <p:cNvPr id="6" name="Text 3"/>
           <p:cNvSpPr txBox="1"/>
           <p:nvPr/>
         </p:nvSpPr>
         <p:spPr>
           <a:xfrm>
             <a:off x="777240" y="2057400"/>
-            <a:ext cx="3026664" cy="548640"/>
+            <a:ext cx="2020824" cy="548640"/>
           </a:xfrm>
           <a:prstGeom prst="rect">
             <a:avLst/>
@@ -6743,14 +6738,14 @@
       </p:sp>
       <p:sp>
         <p:nvSpPr>
-          <p:cNvPr id="6" name="Text 4"/>
+          <p:cNvPr id="7" name="Text 4"/>
           <p:cNvSpPr txBox="1"/>
           <p:nvPr/>
         </p:nvSpPr>
         <p:spPr>
           <a:xfrm>
             <a:off x="777240" y="2651760"/>
-            <a:ext cx="3026664" cy="914400"/>
+            <a:ext cx="2020824" cy="914400"/>
           </a:xfrm>
           <a:prstGeom prst="rect">
             <a:avLst/>
@@ -6768,7 +6763,7 @@
               <a:buNone/>
             </a:pPr>
             <a:r>
-              <a:rPr lang="ko-KR" altLang="en-US" sz="3800" b="1" dirty="0">
+              <a:rPr lang="ko-KR" altLang="en-US" sz="2500" b="1" dirty="0">
                 <a:solidFill>
                   <a:srgbClr val="4236F6"/>
                 </a:solidFill>
@@ -6779,27 +6774,27 @@
               <a:t>수고했어요</a:t>
             </a:r>
             <a:r>
-              <a:rPr lang="en-US" sz="3800" b="1" dirty="0">
+              <a:rPr lang="en-US" sz="2500" b="1" dirty="0">
                 <a:solidFill>
                   <a:srgbClr val="4236F6"/>
                 </a:solidFill>
               </a:rPr>
               <a:t>!</a:t>
             </a:r>
-            <a:endParaRPr lang="en-US" sz="3800" dirty="0"/>
+            <a:endParaRPr lang="en-US" sz="2500" dirty="0"/>
           </a:p>
         </p:txBody>
       </p:sp>
       <p:sp>
         <p:nvSpPr>
-          <p:cNvPr id="7" name="lista"/>
+          <p:cNvPr id="8" name="lista"/>
           <p:cNvSpPr txBox="1"/>
           <p:nvPr/>
         </p:nvSpPr>
         <p:spPr>
           <a:xfrm>
             <a:off x="731520" y="3657600"/>
-            <a:ext cx="3118104" cy="2377440"/>
+            <a:ext cx="2112264" cy="2377440"/>
           </a:xfrm>
           <a:prstGeom prst="rect">
             <a:avLst/>
@@ -6834,18 +6829,18 @@
       </p:sp>
       <p:sp>
         <p:nvSpPr>
-          <p:cNvPr id="8" name="col_1"/>
+          <p:cNvPr id="9" name="col_1"/>
           <p:cNvSpPr/>
           <p:nvPr/>
         </p:nvSpPr>
         <p:spPr>
           <a:xfrm>
-            <a:off x="4352544" y="1874520"/>
-            <a:ext cx="3483864" cy="4297680"/>
+            <a:off x="3346704" y="1874520"/>
+            <a:ext cx="2478024" cy="4297680"/>
           </a:xfrm>
           <a:prstGeom prst="roundRect">
             <a:avLst>
-              <a:gd name="adj" fmla="val 3937"/>
+              <a:gd name="adj" fmla="val 5535"/>
             </a:avLst>
           </a:prstGeom>
           <a:solidFill>
@@ -6861,14 +6856,14 @@
       </p:sp>
       <p:sp>
         <p:nvSpPr>
-          <p:cNvPr id="9" name="Text 7"/>
+          <p:cNvPr id="10" name="Text 7"/>
           <p:cNvSpPr txBox="1"/>
           <p:nvPr/>
         </p:nvSpPr>
         <p:spPr>
           <a:xfrm>
-            <a:off x="4581144" y="2057400"/>
-            <a:ext cx="3026664" cy="548640"/>
+            <a:off x="3575304" y="2057400"/>
+            <a:ext cx="2020824" cy="548640"/>
           </a:xfrm>
           <a:prstGeom prst="rect">
             <a:avLst/>
@@ -6899,14 +6894,14 @@
       </p:sp>
       <p:sp>
         <p:nvSpPr>
-          <p:cNvPr id="10" name="Text 8"/>
+          <p:cNvPr id="11" name="Text 8"/>
           <p:cNvSpPr txBox="1"/>
           <p:nvPr/>
         </p:nvSpPr>
         <p:spPr>
           <a:xfrm>
-            <a:off x="4581144" y="2651760"/>
-            <a:ext cx="3026664" cy="914400"/>
+            <a:off x="3575304" y="2651760"/>
+            <a:ext cx="2020824" cy="914400"/>
           </a:xfrm>
           <a:prstGeom prst="rect">
             <a:avLst/>
@@ -6924,7 +6919,7 @@
               <a:buNone/>
             </a:pPr>
             <a:r>
-              <a:rPr lang="ko-KR" altLang="en-US" sz="3800" b="1" dirty="0">
+              <a:rPr lang="ko-KR" altLang="en-US" sz="2500" b="1" dirty="0">
                 <a:solidFill>
                   <a:srgbClr val="4236F6"/>
                 </a:solidFill>
@@ -6935,27 +6930,27 @@
               <a:t>감사합니다</a:t>
             </a:r>
             <a:r>
-              <a:rPr lang="en-US" sz="3800" b="1" dirty="0">
+              <a:rPr lang="en-US" sz="2500" b="1" dirty="0">
                 <a:solidFill>
                   <a:srgbClr val="4236F6"/>
                 </a:solidFill>
               </a:rPr>
               <a:t>!</a:t>
             </a:r>
-            <a:endParaRPr lang="en-US" sz="3800" dirty="0"/>
+            <a:endParaRPr lang="en-US" sz="2500" dirty="0"/>
           </a:p>
         </p:txBody>
       </p:sp>
       <p:sp>
         <p:nvSpPr>
-          <p:cNvPr id="11" name="lista"/>
+          <p:cNvPr id="12" name="lista"/>
           <p:cNvSpPr txBox="1"/>
           <p:nvPr/>
         </p:nvSpPr>
         <p:spPr>
           <a:xfrm>
-            <a:off x="4535424" y="3657600"/>
-            <a:ext cx="3118104" cy="2377440"/>
+            <a:off x="3529584" y="3657600"/>
+            <a:ext cx="2112264" cy="2377440"/>
           </a:xfrm>
           <a:prstGeom prst="rect">
             <a:avLst/>
@@ -6990,18 +6985,18 @@
       </p:sp>
       <p:sp>
         <p:nvSpPr>
-          <p:cNvPr id="12" name="col_2"/>
+          <p:cNvPr id="13" name="col_2"/>
           <p:cNvSpPr/>
           <p:nvPr/>
         </p:nvSpPr>
         <p:spPr>
           <a:xfrm>
-            <a:off x="8156448" y="1874520"/>
-            <a:ext cx="3483864" cy="4297680"/>
+            <a:off x="6144768" y="1874520"/>
+            <a:ext cx="2478024" cy="4297680"/>
           </a:xfrm>
           <a:prstGeom prst="roundRect">
             <a:avLst>
-              <a:gd name="adj" fmla="val 3937"/>
+              <a:gd name="adj" fmla="val 5535"/>
             </a:avLst>
           </a:prstGeom>
           <a:solidFill>
@@ -7017,14 +7012,14 @@
       </p:sp>
       <p:sp>
         <p:nvSpPr>
-          <p:cNvPr id="13" name="Text 11"/>
+          <p:cNvPr id="14" name="Text 11"/>
           <p:cNvSpPr txBox="1"/>
           <p:nvPr/>
         </p:nvSpPr>
         <p:spPr>
           <a:xfrm>
-            <a:off x="8385048" y="2057400"/>
-            <a:ext cx="3026664" cy="548640"/>
+            <a:off x="6373368" y="2057400"/>
+            <a:ext cx="2020824" cy="548640"/>
           </a:xfrm>
           <a:prstGeom prst="rect">
             <a:avLst/>
@@ -7055,14 +7050,14 @@
       </p:sp>
       <p:sp>
         <p:nvSpPr>
-          <p:cNvPr id="14" name="Text 12"/>
+          <p:cNvPr id="15" name="Text 12"/>
           <p:cNvSpPr txBox="1"/>
           <p:nvPr/>
         </p:nvSpPr>
         <p:spPr>
           <a:xfrm>
-            <a:off x="8385048" y="2651760"/>
-            <a:ext cx="3026664" cy="914400"/>
+            <a:off x="6373368" y="2651760"/>
+            <a:ext cx="2020824" cy="914400"/>
           </a:xfrm>
           <a:prstGeom prst="rect">
             <a:avLst/>
@@ -7080,7 +7075,7 @@
               <a:buNone/>
             </a:pPr>
             <a:r>
-              <a:rPr lang="ko-KR" altLang="en-US" sz="3800" b="1" dirty="0">
+              <a:rPr lang="ko-KR" altLang="en-US" sz="2500" b="1" dirty="0">
                 <a:solidFill>
                   <a:srgbClr val="4236F6"/>
                 </a:solidFill>
@@ -7091,27 +7086,27 @@
               <a:t>수고했어요</a:t>
             </a:r>
             <a:r>
-              <a:rPr lang="en-US" sz="3800" b="1" dirty="0">
+              <a:rPr lang="en-US" sz="2500" b="1" dirty="0">
                 <a:solidFill>
                   <a:srgbClr val="4236F6"/>
                 </a:solidFill>
               </a:rPr>
               <a:t>!</a:t>
             </a:r>
-            <a:endParaRPr lang="en-US" sz="3800" dirty="0"/>
+            <a:endParaRPr lang="en-US" sz="2500" dirty="0"/>
           </a:p>
         </p:txBody>
       </p:sp>
       <p:sp>
         <p:nvSpPr>
-          <p:cNvPr id="15" name="lista"/>
+          <p:cNvPr id="16" name="lista"/>
           <p:cNvSpPr txBox="1"/>
           <p:nvPr/>
         </p:nvSpPr>
         <p:spPr>
           <a:xfrm>
-            <a:off x="8339328" y="3657600"/>
-            <a:ext cx="3118104" cy="2377440"/>
+            <a:off x="6327648" y="3657600"/>
+            <a:ext cx="2112264" cy="2377440"/>
           </a:xfrm>
           <a:prstGeom prst="rect">
             <a:avLst/>
@@ -7345,7 +7340,7 @@
               <a:buChar char="•"/>
             </a:pPr>
             <a:r>
-              <a:rPr lang="ko-KR" altLang="en-US" sz="2400" dirty="0">
+              <a:rPr lang="ko-KR" altLang="en-US" sz="2800" dirty="0">
                 <a:solidFill>
                   <a:srgbClr val="14142B"/>
                 </a:solidFill>
@@ -7356,14 +7351,14 @@
               <a:t>밥을 먹고 커피를 마셨어요</a:t>
             </a:r>
             <a:r>
-              <a:rPr lang="en-US" sz="2400" dirty="0">
+              <a:rPr lang="en-US" sz="2800" dirty="0">
                 <a:solidFill>
                   <a:srgbClr val="14142B"/>
                 </a:solidFill>
               </a:rPr>
               <a:t>. — Comí y tomé café.</a:t>
             </a:r>
-            <a:endParaRPr lang="en-US" sz="2400" dirty="0"/>
+            <a:endParaRPr lang="en-US" sz="2800" dirty="0"/>
           </a:p>
           <a:p>
             <a:pPr marL="228600" indent="-228600" eaLnBrk="1">
@@ -7374,7 +7369,7 @@
               <a:buChar char="•"/>
             </a:pPr>
             <a:r>
-              <a:rPr lang="ko-KR" altLang="en-US" sz="2400" dirty="0">
+              <a:rPr lang="ko-KR" altLang="en-US" sz="2800" dirty="0">
                 <a:solidFill>
                   <a:srgbClr val="14142B"/>
                 </a:solidFill>
@@ -7385,14 +7380,14 @@
               <a:t>한국어는 어렵지만 재미있어요</a:t>
             </a:r>
             <a:r>
-              <a:rPr lang="en-US" sz="2400" dirty="0">
+              <a:rPr lang="en-US" sz="2800" dirty="0">
                 <a:solidFill>
                   <a:srgbClr val="14142B"/>
                 </a:solidFill>
               </a:rPr>
               <a:t>. — El coreano es difícil, pero entretenido.</a:t>
             </a:r>
-            <a:endParaRPr lang="en-US" sz="2400" dirty="0"/>
+            <a:endParaRPr lang="en-US" sz="2800" dirty="0"/>
           </a:p>
           <a:p>
             <a:pPr marL="228600" indent="-228600" eaLnBrk="1">
@@ -7403,7 +7398,7 @@
               <a:buChar char="•"/>
             </a:pPr>
             <a:r>
-              <a:rPr lang="ko-KR" altLang="en-US" sz="2400" dirty="0">
+              <a:rPr lang="ko-KR" altLang="en-US" sz="2800" dirty="0">
                 <a:solidFill>
                   <a:srgbClr val="14142B"/>
                 </a:solidFill>
@@ -7414,14 +7409,14 @@
               <a:t>수고했어요</a:t>
             </a:r>
             <a:r>
-              <a:rPr lang="en-US" sz="2400" dirty="0">
+              <a:rPr lang="en-US" sz="2800" dirty="0">
                 <a:solidFill>
                   <a:srgbClr val="14142B"/>
                 </a:solidFill>
               </a:rPr>
               <a:t>! — ¡Buen trabajo!</a:t>
             </a:r>
-            <a:endParaRPr lang="en-US" sz="2400" dirty="0"/>
+            <a:endParaRPr lang="en-US" sz="2800" dirty="0"/>
           </a:p>
         </p:txBody>
       </p:sp>
@@ -7937,7 +7932,7 @@
         <p:spPr>
           <a:xfrm>
             <a:off x="548640" y="1325880"/>
-            <a:ext cx="11064240" cy="457200"/>
+            <a:ext cx="11091672" cy="457200"/>
           </a:xfrm>
           <a:prstGeom prst="rect">
             <a:avLst/>
@@ -7975,7 +7970,7 @@
           <p:nvPr>
             <p:extLst>
               <p:ext uri="{D42A27DB-BD31-4B8C-83A1-F6EECF244321}">
-                <p14:modId xmlns:p14="http://schemas.microsoft.com/office/powerpoint/2010/main" val="2335838771"/>
+                <p14:modId xmlns:p14="http://schemas.microsoft.com/office/powerpoint/2010/main" val="986595403"/>
               </p:ext>
             </p:extLst>
           </p:nvPr>
@@ -10115,7 +10110,7 @@
               <a:buChar char="•"/>
             </a:pPr>
             <a:r>
-              <a:rPr lang="ko-KR" altLang="en-US" sz="2400" dirty="0">
+              <a:rPr lang="ko-KR" altLang="en-US" sz="2800" dirty="0">
                 <a:solidFill>
                   <a:srgbClr val="14142B"/>
                 </a:solidFill>
@@ -10126,14 +10121,14 @@
               <a:t>Escribe 가 </a:t>
             </a:r>
             <a:r>
-              <a:rPr lang="en-US" sz="2400" dirty="0">
+              <a:rPr lang="en-US" sz="2800" dirty="0">
                 <a:solidFill>
                   <a:srgbClr val="14142B"/>
                 </a:solidFill>
               </a:rPr>
               <a:t>en el chat con tu teclado coreano</a:t>
             </a:r>
-            <a:endParaRPr lang="en-US" sz="2400" dirty="0"/>
+            <a:endParaRPr lang="en-US" sz="2800" dirty="0"/>
           </a:p>
           <a:p>
             <a:pPr marL="228600" indent="-228600" eaLnBrk="1">
@@ -10144,14 +10139,14 @@
               <a:buChar char="•"/>
             </a:pPr>
             <a:r>
-              <a:rPr lang="en-US" sz="2400" dirty="0">
+              <a:rPr lang="en-US" sz="2800" dirty="0">
                 <a:solidFill>
                   <a:srgbClr val="14142B"/>
                 </a:solidFill>
               </a:rPr>
               <a:t>Audífonos puestos</a:t>
             </a:r>
-            <a:endParaRPr lang="en-US" sz="2400" dirty="0"/>
+            <a:endParaRPr lang="en-US" sz="2800" dirty="0"/>
           </a:p>
           <a:p>
             <a:pPr marL="228600" indent="-228600" eaLnBrk="1">
@@ -10162,14 +10157,14 @@
               <a:buChar char="•"/>
             </a:pPr>
             <a:r>
-              <a:rPr lang="en-US" sz="2400" dirty="0">
+              <a:rPr lang="en-US" sz="2800" dirty="0">
                 <a:solidFill>
                   <a:srgbClr val="14142B"/>
                 </a:solidFill>
               </a:rPr>
               <a:t>Celular cargado, al lado</a:t>
             </a:r>
-            <a:endParaRPr lang="en-US" sz="2400" dirty="0"/>
+            <a:endParaRPr lang="en-US" sz="2800" dirty="0"/>
           </a:p>
           <a:p>
             <a:pPr marL="228600" indent="-228600" eaLnBrk="1">
@@ -10180,14 +10175,14 @@
               <a:buChar char="•"/>
             </a:pPr>
             <a:r>
-              <a:rPr lang="en-US" sz="2400" dirty="0">
+              <a:rPr lang="en-US" sz="2800" dirty="0">
                 <a:solidFill>
                   <a:srgbClr val="14142B"/>
                 </a:solidFill>
               </a:rPr>
               <a:t>Tarjeta de la conversación a mano (sección 7 de tu material)</a:t>
             </a:r>
-            <a:endParaRPr lang="en-US" sz="2400" dirty="0"/>
+            <a:endParaRPr lang="en-US" sz="2800" dirty="0"/>
           </a:p>
         </p:txBody>
       </p:sp>
@@ -10747,7 +10742,7 @@
         <p:spPr>
           <a:xfrm>
             <a:off x="548640" y="1325880"/>
-            <a:ext cx="11064240" cy="457200"/>
+            <a:ext cx="11091672" cy="457200"/>
           </a:xfrm>
           <a:prstGeom prst="rect">
             <a:avLst/>
@@ -10785,7 +10780,7 @@
           <p:nvPr>
             <p:extLst>
               <p:ext uri="{D42A27DB-BD31-4B8C-83A1-F6EECF244321}">
-                <p14:modId xmlns:p14="http://schemas.microsoft.com/office/powerpoint/2010/main" val="587337520"/>
+                <p14:modId xmlns:p14="http://schemas.microsoft.com/office/powerpoint/2010/main" val="1325408713"/>
               </p:ext>
             </p:extLst>
           </p:nvPr>
@@ -12148,8 +12143,8 @@
         </p:nvSpPr>
         <p:spPr>
           <a:xfrm>
-            <a:off x="1463040" y="3657600"/>
-            <a:ext cx="9262872" cy="822960"/>
+            <a:off x="1783080" y="3657600"/>
+            <a:ext cx="8439912" cy="822960"/>
           </a:xfrm>
           <a:prstGeom prst="rect">
             <a:avLst/>
@@ -12556,7 +12551,7 @@
                 <a:ea typeface="Malgun Gothic" pitchFamily="34" charset="-122"/>
                 <a:cs typeface="Malgun Gothic" pitchFamily="34" charset="-120"/>
               </a:rPr>
-              <a:t>매일 아홉 시부터 여섯 시까지 일해요</a:t>
+              <a:t>매일 아홉 시부터 여섯 시까지 일해요</a:t>
             </a:r>
             <a:r>
               <a:rPr lang="en-US" sz="2400" dirty="0">
@@ -12896,7 +12891,7 @@
           <p:nvPr>
             <p:extLst>
               <p:ext uri="{D42A27DB-BD31-4B8C-83A1-F6EECF244321}">
-                <p14:modId xmlns:p14="http://schemas.microsoft.com/office/powerpoint/2010/main" val="2749257031"/>
+                <p14:modId xmlns:p14="http://schemas.microsoft.com/office/powerpoint/2010/main" val="655275907"/>
               </p:ext>
             </p:extLst>
           </p:nvPr>
@@ -13726,7 +13721,7 @@
         <p:spPr>
           <a:xfrm>
             <a:off x="548640" y="1325880"/>
-            <a:ext cx="11064240" cy="548640"/>
+            <a:ext cx="11091672" cy="548640"/>
           </a:xfrm>
           <a:prstGeom prst="rect">
             <a:avLst/>
@@ -14213,7 +14208,7 @@
                 <a:ea typeface="Malgun Gothic" pitchFamily="34" charset="-122"/>
                 <a:cs typeface="Malgun Gothic" pitchFamily="34" charset="-120"/>
               </a:rPr>
-              <a:t>운전은 할 수 있지만 수영은 못 해요</a:t>
+              <a:t>운전은 할 수 있지만 수영은 못 해요</a:t>
             </a:r>
             <a:r>
               <a:rPr lang="en-US" sz="2400" dirty="0">
@@ -14940,7 +14935,7 @@
         <p:spPr>
           <a:xfrm>
             <a:off x="548640" y="1325880"/>
-            <a:ext cx="6949440" cy="548640"/>
+            <a:ext cx="5669280" cy="548640"/>
           </a:xfrm>
           <a:prstGeom prst="rect">
             <a:avLst/>
@@ -14989,7 +14984,7 @@
         <p:spPr>
           <a:xfrm>
             <a:off x="548640" y="1965960"/>
-            <a:ext cx="6949440" cy="4206240"/>
+            <a:ext cx="5669280" cy="4206240"/>
           </a:xfrm>
           <a:prstGeom prst="rect">
             <a:avLst/>
@@ -15387,12 +15382,12 @@
         </p:nvSpPr>
         <p:spPr>
           <a:xfrm>
-            <a:off x="8001000" y="1417320"/>
-            <a:ext cx="3611880" cy="4480560"/>
+            <a:off x="6446520" y="1371600"/>
+            <a:ext cx="5193792" cy="4800600"/>
           </a:xfrm>
           <a:prstGeom prst="roundRect">
             <a:avLst>
-              <a:gd name="adj" fmla="val 6329"/>
+              <a:gd name="adj" fmla="val 4762"/>
             </a:avLst>
           </a:prstGeom>
           <a:solidFill>
@@ -15406,16 +15401,40 @@
           </a:ln>
         </p:spPr>
       </p:sp>
-      <p:sp>
-        <p:nvSpPr>
-          <p:cNvPr id="6" name="ko_grande"/>
+      <p:pic>
+        <p:nvPicPr>
+          <p:cNvPr id="6" name="imagen" descr="C:\Users\Chingu\AppData\Local\Temp\claude\C--Users-Chingu-Desktop-ACADEMIASEULWEB\d4111e1b-5523-44ea-97b2-b1a1d9545b9e\scratchpad\decks\cache\img_aa6500c366bed34e.png"/>
+          <p:cNvPicPr>
+            <a:picLocks noChangeAspect="1"/>
+          </p:cNvPicPr>
+          <p:nvPr/>
+        </p:nvPicPr>
+        <p:blipFill>
+          <a:blip r:embed="rId3"/>
+          <a:stretch>
+            <a:fillRect/>
+          </a:stretch>
+        </p:blipFill>
+        <p:spPr>
+          <a:xfrm>
+            <a:off x="7437384" y="1463040"/>
+            <a:ext cx="3212063" cy="3703320"/>
+          </a:xfrm>
+          <a:prstGeom prst="rect">
+            <a:avLst/>
+          </a:prstGeom>
+        </p:spPr>
+      </p:pic>
+      <p:sp>
+        <p:nvSpPr>
+          <p:cNvPr id="7" name="ko_grande"/>
           <p:cNvSpPr txBox="1"/>
           <p:nvPr/>
         </p:nvSpPr>
         <p:spPr>
           <a:xfrm>
-            <a:off x="8092440" y="1874520"/>
-            <a:ext cx="3429000" cy="2926080"/>
+            <a:off x="6583680" y="5257800"/>
+            <a:ext cx="4919472" cy="777240"/>
           </a:xfrm>
           <a:prstGeom prst="rect">
             <a:avLst/>
@@ -15433,7 +15452,7 @@
               <a:buNone/>
             </a:pPr>
             <a:r>
-              <a:rPr lang="ko-KR" altLang="en-US" sz="9600" b="1" dirty="0">
+              <a:rPr lang="ko-KR" altLang="en-US" sz="4000" b="1" dirty="0">
                 <a:solidFill>
                   <a:srgbClr val="4236F6"/>
                 </a:solidFill>
@@ -15443,7 +15462,7 @@
               </a:rPr>
               <a:t>-고</a:t>
             </a:r>
-            <a:endParaRPr lang="en-US" sz="9600" dirty="0"/>
+            <a:endParaRPr lang="en-US" sz="4000" dirty="0"/>
           </a:p>
         </p:txBody>
       </p:sp>
@@ -15588,7 +15607,7 @@
         <p:spPr>
           <a:xfrm>
             <a:off x="548640" y="1325880"/>
-            <a:ext cx="6949440" cy="548640"/>
+            <a:ext cx="5669280" cy="548640"/>
           </a:xfrm>
           <a:prstGeom prst="rect">
             <a:avLst/>
@@ -15637,7 +15656,7 @@
         <p:spPr>
           <a:xfrm>
             <a:off x="548640" y="1965960"/>
-            <a:ext cx="6949440" cy="4206240"/>
+            <a:ext cx="5669280" cy="4206240"/>
           </a:xfrm>
           <a:prstGeom prst="rect">
             <a:avLst/>
@@ -15743,7 +15762,7 @@
                 <a:ea typeface="Malgun Gothic" pitchFamily="34" charset="-122"/>
                 <a:cs typeface="Malgun Gothic" pitchFamily="34" charset="-120"/>
               </a:rPr>
-              <a:t>할 수 있다 </a:t>
+              <a:t>할 수 있다 </a:t>
             </a:r>
             <a:r>
               <a:rPr lang="en-US" sz="2400" dirty="0">
@@ -15762,7 +15781,7 @@
                 <a:ea typeface="Malgun Gothic" pitchFamily="34" charset="-122"/>
                 <a:cs typeface="Malgun Gothic" pitchFamily="34" charset="-120"/>
               </a:rPr>
-              <a:t>할 수 있지만</a:t>
+              <a:t>할 수 있지만</a:t>
             </a:r>
             <a:endParaRPr lang="en-US" sz="2400" dirty="0"/>
           </a:p>
@@ -15979,12 +15998,12 @@
         </p:nvSpPr>
         <p:spPr>
           <a:xfrm>
-            <a:off x="8001000" y="1417320"/>
-            <a:ext cx="3611880" cy="4480560"/>
+            <a:off x="6446520" y="1371600"/>
+            <a:ext cx="5193792" cy="4800600"/>
           </a:xfrm>
           <a:prstGeom prst="roundRect">
             <a:avLst>
-              <a:gd name="adj" fmla="val 6329"/>
+              <a:gd name="adj" fmla="val 4762"/>
             </a:avLst>
           </a:prstGeom>
           <a:solidFill>
@@ -15998,16 +16017,40 @@
           </a:ln>
         </p:spPr>
       </p:sp>
-      <p:sp>
-        <p:nvSpPr>
-          <p:cNvPr id="6" name="ko_grande"/>
+      <p:pic>
+        <p:nvPicPr>
+          <p:cNvPr id="6" name="imagen" descr="C:\Users\Chingu\AppData\Local\Temp\claude\C--Users-Chingu-Desktop-ACADEMIASEULWEB\d4111e1b-5523-44ea-97b2-b1a1d9545b9e\scratchpad\decks\cache\img_d81cbc5e3d0d9876.png"/>
+          <p:cNvPicPr>
+            <a:picLocks noChangeAspect="1"/>
+          </p:cNvPicPr>
+          <p:nvPr/>
+        </p:nvPicPr>
+        <p:blipFill>
+          <a:blip r:embed="rId3"/>
+          <a:stretch>
+            <a:fillRect/>
+          </a:stretch>
+        </p:blipFill>
+        <p:spPr>
+          <a:xfrm>
+            <a:off x="7437384" y="1463040"/>
+            <a:ext cx="3212063" cy="3703320"/>
+          </a:xfrm>
+          <a:prstGeom prst="rect">
+            <a:avLst/>
+          </a:prstGeom>
+        </p:spPr>
+      </p:pic>
+      <p:sp>
+        <p:nvSpPr>
+          <p:cNvPr id="7" name="ko_grande"/>
           <p:cNvSpPr txBox="1"/>
           <p:nvPr/>
         </p:nvSpPr>
         <p:spPr>
           <a:xfrm>
-            <a:off x="8092440" y="1874520"/>
-            <a:ext cx="3429000" cy="2926080"/>
+            <a:off x="6583680" y="5257800"/>
+            <a:ext cx="4919472" cy="777240"/>
           </a:xfrm>
           <a:prstGeom prst="rect">
             <a:avLst/>
@@ -16025,7 +16068,7 @@
               <a:buNone/>
             </a:pPr>
             <a:r>
-              <a:rPr lang="ko-KR" altLang="en-US" sz="9000" b="1" dirty="0">
+              <a:rPr lang="ko-KR" altLang="en-US" sz="4000" b="1" dirty="0">
                 <a:solidFill>
                   <a:srgbClr val="4236F6"/>
                 </a:solidFill>
@@ -16035,7 +16078,7 @@
               </a:rPr>
               <a:t>-지만</a:t>
             </a:r>
-            <a:endParaRPr lang="en-US" sz="9000" dirty="0"/>
+            <a:endParaRPr lang="en-US" sz="4000" dirty="0"/>
           </a:p>
         </p:txBody>
       </p:sp>
@@ -16169,7 +16212,7 @@
         <p:spPr>
           <a:xfrm>
             <a:off x="548640" y="1325880"/>
-            <a:ext cx="11064240" cy="457200"/>
+            <a:ext cx="11091672" cy="457200"/>
           </a:xfrm>
           <a:prstGeom prst="rect">
             <a:avLst/>
@@ -16873,7 +16916,7 @@
         <p:spPr>
           <a:xfrm>
             <a:off x="548640" y="1325880"/>
-            <a:ext cx="11064240" cy="457200"/>
+            <a:ext cx="11091672" cy="457200"/>
           </a:xfrm>
           <a:prstGeom prst="rect">
             <a:avLst/>
@@ -16960,7 +17003,7 @@
           <p:nvPr>
             <p:extLst>
               <p:ext uri="{D42A27DB-BD31-4B8C-83A1-F6EECF244321}">
-                <p14:modId xmlns:p14="http://schemas.microsoft.com/office/powerpoint/2010/main" val="4080711072"/>
+                <p14:modId xmlns:p14="http://schemas.microsoft.com/office/powerpoint/2010/main" val="1261059495"/>
               </p:ext>
             </p:extLst>
           </p:nvPr>
@@ -18463,7 +18506,7 @@
         <p:spPr>
           <a:xfrm>
             <a:off x="548640" y="1325880"/>
-            <a:ext cx="11064240" cy="457200"/>
+            <a:ext cx="11091672" cy="457200"/>
           </a:xfrm>
           <a:prstGeom prst="rect">
             <a:avLst/>
@@ -18512,7 +18555,7 @@
           <p:nvPr>
             <p:extLst>
               <p:ext uri="{D42A27DB-BD31-4B8C-83A1-F6EECF244321}">
-                <p14:modId xmlns:p14="http://schemas.microsoft.com/office/powerpoint/2010/main" val="480667243"/>
+                <p14:modId xmlns:p14="http://schemas.microsoft.com/office/powerpoint/2010/main" val="2598067793"/>
               </p:ext>
             </p:extLst>
           </p:nvPr>
@@ -18900,7 +18943,7 @@
                           <a:ea typeface="Malgun Gothic" pitchFamily="34" charset="-122"/>
                           <a:cs typeface="Malgun Gothic" pitchFamily="34" charset="-120"/>
                         </a:rPr>
-                        <a:t>운전은 할 수 있어요 </a:t>
+                        <a:t>운전은 할 수 있어요 </a:t>
                       </a:r>
                       <a:r>
                         <a:rPr lang="en-US" sz="1600" dirty="0">

--- a/Curriculo/Fase3_Basico2/decks/Basico2_S08_Jay.pptx
+++ b/Curriculo/Fase3_Basico2/decks/Basico2_S08_Jay.pptx
@@ -129,7 +129,7 @@
   <p:extLst>
     <p:ext uri="{521415D9-36F7-43E2-AB2F-B90AF26B5E84}">
       <p14:sectionLst xmlns:p14="http://schemas.microsoft.com/office/powerpoint/2010/main">
-        <p14:section name="Semana 8" id="{0B453D89-3BBA-A90F-0E44-5B3AD1914516}">
+        <p14:section name="Semana 8" id="{E200CE18-EF83-0D9D-9D50-7B936E57C16F}">
           <p14:sldIdLst>
             <p14:sldId id="256"/>
             <p14:sldId id="257"/>
@@ -190,7 +190,7 @@
     </p:spTree>
     <p:extLst>
       <p:ext uri="{BB962C8B-B14F-4D97-AF65-F5344CB8AC3E}">
-        <p14:creationId xmlns:p14="http://schemas.microsoft.com/office/powerpoint/2010/main" val="1638754229"/>
+        <p14:creationId xmlns:p14="http://schemas.microsoft.com/office/powerpoint/2010/main" val="274423654"/>
       </p:ext>
     </p:extLst>
   </p:cSld>
@@ -1050,7 +1050,7 @@
           <a:p>
             <a:r>
               <a:rPr lang="en-US" dirty="0"/>
-              <a:t>21:58–21:59 (30 s de chat + 40 s de tarea). Pide al chat una frase con -지만 sobre el curso y lee 2 o 3 en voz alta (si no hay tiempo, van en el mensaje de la noche). La captura de Progreso es recomendada, no obligatoria; el Contrarreloj trae opciones con letras latinas: que digan la palabra en voz alta antes de mirarlas. El plazo del audio final lo confirmas en el grupo (propuesta: dom 6 dic).
+              <a:t>21:58–21:59 (30 s de chat + 40 s de tarea). Pide al chat una frase con -지만 sobre el curso y lee 2 o 3 en voz alta (si no hay tiempo, van en el mensaje de la noche). La captura de Progreso es recomendada, no obligatoria; el Contrarreloj trae opciones con letras latinas: que digan la palabra en voz alta antes de mirarlas. El plazo del audio final lo confirmas en el grupo (propuesta: dom 13 dic).
 Fuente: Nueva
 Lámina 16</a:t>
             </a:r>
@@ -1139,7 +1139,7 @@
           <a:p>
             <a:r>
               <a:rPr lang="en-US" dirty="0"/>
-              <a:t>21:59 (parte de los 40 s). «El viernes les llega el examen corregido; el certificado, la semana del 7 de diciembre.» Las fechas dependen de las DECISIONES DE JAY 3, 6 y 11: no prometas en vivo nada sobre el pase a Conversacional 1 (si preguntan: «El viernes les escribo a cada uno»).
+              <a:t>21:59 (parte de los 40 s). «El viernes les llega el examen corregido; el certificado, la semana del 14 de diciembre.» Las fechas dependen de las DECISIONES DE JAY 3, 6 y 11: no prometas en vivo nada sobre el pase a Conversacional 1 (si preguntan: «El viernes les escribo a cada uno»).
 Fuente: Diseño de Sesion_11_Cierre_A1.pptx lám. 9, con contenido nuevo
 Lámina 17</a:t>
             </a:r>
@@ -1317,7 +1317,7 @@
           <a:p>
             <a:r>
               <a:rPr lang="en-US" dirty="0"/>
-              <a:t>20:45–21:00. Zoom con clave de anfitrión, formulario del examen abierto sin aceptar respuestas, link copiado, PDF del plan B, planilla de rúbrica y lista de la cadena a mano. Inicia la grabación en la nube a las 21:00 (Basico2_S08_2026-12-02). La línea del celular va solo si en la S7 se acordó grabar la conversación (DECISIÓN DE JAY 4).
+              <a:t>20:45–21:00. Zoom con clave de anfitrión, formulario del examen abierto sin aceptar respuestas, link copiado, PDF del plan B, planilla de rúbrica y lista de la cadena a mano. Inicia la grabación en la nube a las 21:00 (Basico2_S08_2026-12-09). La línea del celular va solo si en la S7 se acordó grabar la conversación (DECISIÓN DE JAY 4).
 Fuente: Nueva
 Lámina 1</a:t>
             </a:r>
@@ -3422,7 +3422,7 @@
                   <a:srgbClr val="E8B84B"/>
                 </a:solidFill>
               </a:rPr>
-              <a:t>Miércoles 2 de diciembre de 2026 · 21:00 (hora de Chile)</a:t>
+              <a:t>Miércoles 9 de diciembre de 2026 · 21:00 (hora de Chile)</a:t>
             </a:r>
             <a:endParaRPr lang="en-US" sz="2200" dirty="0"/>
           </a:p>
@@ -4872,7 +4872,7 @@
           <p:nvPr>
             <p:extLst>
               <p:ext uri="{D42A27DB-BD31-4B8C-83A1-F6EECF244321}">
-                <p14:modId xmlns:p14="http://schemas.microsoft.com/office/powerpoint/2010/main" val="3359274737"/>
+                <p14:modId xmlns:p14="http://schemas.microsoft.com/office/powerpoint/2010/main" val="1425436837"/>
               </p:ext>
             </p:extLst>
           </p:nvPr>
@@ -7680,7 +7680,7 @@
                   <a:srgbClr val="14142B"/>
                 </a:solidFill>
               </a:rPr>
-              <a:t>2) Escúchalo al lado de tu audio del 14 de octubre: tu antes y después</a:t>
+              <a:t>2) Escúchalo al lado de tu audio del 21 de octubre: tu antes y después</a:t>
             </a:r>
             <a:endParaRPr lang="en-US" sz="2000" dirty="0"/>
           </a:p>
@@ -7716,7 +7716,7 @@
                   <a:srgbClr val="14142B"/>
                 </a:solidFill>
               </a:rPr>
-              <a:t>¿No te escuché en la sala? Audio de 3 min hasta el vie 4 dic, 22:00</a:t>
+              <a:t>¿No te escuché en la sala? Audio de 3 min hasta el vie 11 dic, 22:00</a:t>
             </a:r>
             <a:endParaRPr lang="en-US" sz="2000" dirty="0"/>
           </a:p>
@@ -7955,7 +7955,7 @@
                   <a:srgbClr val="4236F6"/>
                 </a:solidFill>
               </a:rPr>
-              <a:t>Vie 4 dic: examen corregido · semana del 7 dic: certificado · siguiente peldaño: Conversacional 1 (A2.1)</a:t>
+              <a:t>Vie 11 dic: examen corregido · semana del 14 dic: certificado · siguiente peldaño: Conversacional 1 (A2.1)</a:t>
             </a:r>
             <a:endParaRPr lang="en-US" sz="1800" dirty="0"/>
           </a:p>
@@ -7970,7 +7970,7 @@
           <p:nvPr>
             <p:extLst>
               <p:ext uri="{D42A27DB-BD31-4B8C-83A1-F6EECF244321}">
-                <p14:modId xmlns:p14="http://schemas.microsoft.com/office/powerpoint/2010/main" val="986595403"/>
+                <p14:modId xmlns:p14="http://schemas.microsoft.com/office/powerpoint/2010/main" val="826549739"/>
               </p:ext>
             </p:extLst>
           </p:nvPr>
@@ -10780,7 +10780,7 @@
           <p:nvPr>
             <p:extLst>
               <p:ext uri="{D42A27DB-BD31-4B8C-83A1-F6EECF244321}">
-                <p14:modId xmlns:p14="http://schemas.microsoft.com/office/powerpoint/2010/main" val="1325408713"/>
+                <p14:modId xmlns:p14="http://schemas.microsoft.com/office/powerpoint/2010/main" val="861275923"/>
               </p:ext>
             </p:extLst>
           </p:nvPr>
@@ -12891,7 +12891,7 @@
           <p:nvPr>
             <p:extLst>
               <p:ext uri="{D42A27DB-BD31-4B8C-83A1-F6EECF244321}">
-                <p14:modId xmlns:p14="http://schemas.microsoft.com/office/powerpoint/2010/main" val="655275907"/>
+                <p14:modId xmlns:p14="http://schemas.microsoft.com/office/powerpoint/2010/main" val="178810736"/>
               </p:ext>
             </p:extLst>
           </p:nvPr>
@@ -17003,7 +17003,7 @@
           <p:nvPr>
             <p:extLst>
               <p:ext uri="{D42A27DB-BD31-4B8C-83A1-F6EECF244321}">
-                <p14:modId xmlns:p14="http://schemas.microsoft.com/office/powerpoint/2010/main" val="1261059495"/>
+                <p14:modId xmlns:p14="http://schemas.microsoft.com/office/powerpoint/2010/main" val="414394269"/>
               </p:ext>
             </p:extLst>
           </p:nvPr>
@@ -18555,7 +18555,7 @@
           <p:nvPr>
             <p:extLst>
               <p:ext uri="{D42A27DB-BD31-4B8C-83A1-F6EECF244321}">
-                <p14:modId xmlns:p14="http://schemas.microsoft.com/office/powerpoint/2010/main" val="2598067793"/>
+                <p14:modId xmlns:p14="http://schemas.microsoft.com/office/powerpoint/2010/main" val="3745574417"/>
               </p:ext>
             </p:extLst>
           </p:nvPr>
